--- a/Week_5/Week_5.pptx
+++ b/Week_5/Week_5.pptx
@@ -6458,7 +6458,7 @@
           <a:p>
             <a:r>
               <a:rPr lang="en-US" dirty="0"/>
-              <a:t>R lab will not be what I showed you</a:t>
+              <a:t>R lab for Quarto</a:t>
             </a:r>
           </a:p>
         </p:txBody>
@@ -6481,12 +6481,23 @@
         </p:nvSpPr>
         <p:spPr/>
         <p:txBody>
-          <a:bodyPr/>
-          <a:lstStyle/>
-          <a:p>
-            <a:r>
-              <a:rPr lang="en-US" dirty="0"/>
+          <a:bodyPr>
+            <a:normAutofit/>
+          </a:bodyPr>
+          <a:lstStyle/>
+          <a:p>
+            <a:r>
+              <a:rPr lang="en-US" sz="3600" dirty="0"/>
               <a:t>For learning Quarto– I will have everyone create a document and play with it on your own. </a:t>
+            </a:r>
+          </a:p>
+          <a:p>
+            <a:endParaRPr lang="en-US" sz="3600" dirty="0"/>
+          </a:p>
+          <a:p>
+            <a:r>
+              <a:rPr lang="en-US" sz="3600" dirty="0"/>
+              <a:t>Hopefully my document renders for you, but more important is everyone creating their own document!! </a:t>
             </a:r>
           </a:p>
         </p:txBody>
